--- a/Data/PPT_Learn/PPT_File/13.pptx
+++ b/Data/PPT_Learn/PPT_File/13.pptx
@@ -3363,7 +3363,7 @@
           <a:p>
             <a:fld id="{51DA3061-A0A7-4F4A-8031-9CD73C4CB18A}" type="datetimeFigureOut">
               <a:rPr lang="en-US" smtClean="0"/>
-              <a:t>24/2/2025</a:t>
+              <a:t>12/1/2025</a:t>
             </a:fld>
             <a:endParaRPr lang="en-US"/>
           </a:p>
@@ -3561,7 +3561,7 @@
           <a:p>
             <a:fld id="{51DA3061-A0A7-4F4A-8031-9CD73C4CB18A}" type="datetimeFigureOut">
               <a:rPr lang="en-US" smtClean="0"/>
-              <a:t>24/2/2025</a:t>
+              <a:t>12/1/2025</a:t>
             </a:fld>
             <a:endParaRPr lang="en-US"/>
           </a:p>
@@ -3769,7 +3769,7 @@
           <a:p>
             <a:fld id="{51DA3061-A0A7-4F4A-8031-9CD73C4CB18A}" type="datetimeFigureOut">
               <a:rPr lang="en-US" smtClean="0"/>
-              <a:t>24/2/2025</a:t>
+              <a:t>12/1/2025</a:t>
             </a:fld>
             <a:endParaRPr lang="en-US"/>
           </a:p>
@@ -3967,7 +3967,7 @@
           <a:p>
             <a:fld id="{51DA3061-A0A7-4F4A-8031-9CD73C4CB18A}" type="datetimeFigureOut">
               <a:rPr lang="en-US" smtClean="0"/>
-              <a:t>24/2/2025</a:t>
+              <a:t>12/1/2025</a:t>
             </a:fld>
             <a:endParaRPr lang="en-US"/>
           </a:p>
@@ -4242,7 +4242,7 @@
           <a:p>
             <a:fld id="{51DA3061-A0A7-4F4A-8031-9CD73C4CB18A}" type="datetimeFigureOut">
               <a:rPr lang="en-US" smtClean="0"/>
-              <a:t>24/2/2025</a:t>
+              <a:t>12/1/2025</a:t>
             </a:fld>
             <a:endParaRPr lang="en-US"/>
           </a:p>
@@ -4507,7 +4507,7 @@
           <a:p>
             <a:fld id="{51DA3061-A0A7-4F4A-8031-9CD73C4CB18A}" type="datetimeFigureOut">
               <a:rPr lang="en-US" smtClean="0"/>
-              <a:t>24/2/2025</a:t>
+              <a:t>12/1/2025</a:t>
             </a:fld>
             <a:endParaRPr lang="en-US"/>
           </a:p>
@@ -4919,7 +4919,7 @@
           <a:p>
             <a:fld id="{51DA3061-A0A7-4F4A-8031-9CD73C4CB18A}" type="datetimeFigureOut">
               <a:rPr lang="en-US" smtClean="0"/>
-              <a:t>24/2/2025</a:t>
+              <a:t>12/1/2025</a:t>
             </a:fld>
             <a:endParaRPr lang="en-US"/>
           </a:p>
@@ -5060,7 +5060,7 @@
           <a:p>
             <a:fld id="{51DA3061-A0A7-4F4A-8031-9CD73C4CB18A}" type="datetimeFigureOut">
               <a:rPr lang="en-US" smtClean="0"/>
-              <a:t>24/2/2025</a:t>
+              <a:t>12/1/2025</a:t>
             </a:fld>
             <a:endParaRPr lang="en-US"/>
           </a:p>
@@ -5173,7 +5173,7 @@
           <a:p>
             <a:fld id="{51DA3061-A0A7-4F4A-8031-9CD73C4CB18A}" type="datetimeFigureOut">
               <a:rPr lang="en-US" smtClean="0"/>
-              <a:t>24/2/2025</a:t>
+              <a:t>12/1/2025</a:t>
             </a:fld>
             <a:endParaRPr lang="en-US"/>
           </a:p>
@@ -5484,7 +5484,7 @@
           <a:p>
             <a:fld id="{51DA3061-A0A7-4F4A-8031-9CD73C4CB18A}" type="datetimeFigureOut">
               <a:rPr lang="en-US" smtClean="0"/>
-              <a:t>24/2/2025</a:t>
+              <a:t>12/1/2025</a:t>
             </a:fld>
             <a:endParaRPr lang="en-US"/>
           </a:p>
@@ -5772,7 +5772,7 @@
           <a:p>
             <a:fld id="{51DA3061-A0A7-4F4A-8031-9CD73C4CB18A}" type="datetimeFigureOut">
               <a:rPr lang="en-US" smtClean="0"/>
-              <a:t>24/2/2025</a:t>
+              <a:t>12/1/2025</a:t>
             </a:fld>
             <a:endParaRPr lang="en-US"/>
           </a:p>
@@ -6016,7 +6016,7 @@
           <a:p>
             <a:fld id="{51DA3061-A0A7-4F4A-8031-9CD73C4CB18A}" type="datetimeFigureOut">
               <a:rPr lang="en-US" smtClean="0"/>
-              <a:t>24/2/2025</a:t>
+              <a:t>12/1/2025</a:t>
             </a:fld>
             <a:endParaRPr lang="en-US"/>
           </a:p>
@@ -6630,35 +6630,48 @@
           <a:bodyPr/>
           <a:lstStyle/>
           <a:p>
-            <a:endParaRPr lang="en-US"/>
+            <a:r>
+              <a:rPr lang="en-US" dirty="0"/>
+              <a:t>YOGA </a:t>
+            </a:r>
           </a:p>
         </p:txBody>
       </p:sp>
-      <p:sp>
-        <p:nvSpPr>
-          <p:cNvPr id="3" name="Content Placeholder 2">
+      <p:pic>
+        <p:nvPicPr>
+          <p:cNvPr id="5" name="Content Placeholder 4">
             <a:extLst>
               <a:ext uri="{FF2B5EF4-FFF2-40B4-BE49-F238E27FC236}">
-                <a16:creationId xmlns:a16="http://schemas.microsoft.com/office/drawing/2014/main" id="{E2F6F496-2D56-8D19-D411-04494F4906E2}"/>
+                <a16:creationId xmlns:a16="http://schemas.microsoft.com/office/drawing/2014/main" id="{C9A2ABFC-9D21-B32A-CE63-F49D42543D9C}"/>
               </a:ext>
             </a:extLst>
           </p:cNvPr>
-          <p:cNvSpPr>
-            <a:spLocks noGrp="1"/>
-          </p:cNvSpPr>
+          <p:cNvPicPr>
+            <a:picLocks noGrp="1" noChangeAspect="1"/>
+          </p:cNvPicPr>
           <p:nvPr>
             <p:ph idx="1"/>
           </p:nvPr>
-        </p:nvSpPr>
-        <p:spPr/>
-        <p:txBody>
-          <a:bodyPr/>
-          <a:lstStyle/>
-          <a:p>
-            <a:endParaRPr lang="en-US"/>
-          </a:p>
-        </p:txBody>
-      </p:sp>
+        </p:nvPicPr>
+        <p:blipFill>
+          <a:blip r:embed="rId2">
+            <a:extLst>
+              <a:ext uri="{28A0092B-C50C-407E-A947-70E740481C1C}">
+                <a14:useLocalDpi xmlns:a14="http://schemas.microsoft.com/office/drawing/2010/main" val="0"/>
+              </a:ext>
+            </a:extLst>
+          </a:blip>
+          <a:stretch>
+            <a:fillRect/>
+          </a:stretch>
+        </p:blipFill>
+        <p:spPr>
+          <a:xfrm>
+            <a:off x="2481479" y="2898"/>
+            <a:ext cx="9710521" cy="6855102"/>
+          </a:xfrm>
+        </p:spPr>
+      </p:pic>
     </p:spTree>
     <p:extLst>
       <p:ext uri="{BB962C8B-B14F-4D97-AF65-F5344CB8AC3E}">
@@ -6714,31 +6727,41 @@
           </a:p>
         </p:txBody>
       </p:sp>
-      <p:sp>
-        <p:nvSpPr>
-          <p:cNvPr id="3" name="Content Placeholder 2">
+      <p:pic>
+        <p:nvPicPr>
+          <p:cNvPr id="5" name="Content Placeholder 4">
             <a:extLst>
               <a:ext uri="{FF2B5EF4-FFF2-40B4-BE49-F238E27FC236}">
-                <a16:creationId xmlns:a16="http://schemas.microsoft.com/office/drawing/2014/main" id="{8A7237F6-C8CC-976C-C3A8-A09EED423C90}"/>
+                <a16:creationId xmlns:a16="http://schemas.microsoft.com/office/drawing/2014/main" id="{16EDDE61-FE24-8124-4E84-3A1F12675AF6}"/>
               </a:ext>
             </a:extLst>
           </p:cNvPr>
-          <p:cNvSpPr>
-            <a:spLocks noGrp="1"/>
-          </p:cNvSpPr>
+          <p:cNvPicPr>
+            <a:picLocks noGrp="1" noChangeAspect="1"/>
+          </p:cNvPicPr>
           <p:nvPr>
             <p:ph idx="1"/>
           </p:nvPr>
-        </p:nvSpPr>
-        <p:spPr/>
-        <p:txBody>
-          <a:bodyPr/>
-          <a:lstStyle/>
-          <a:p>
-            <a:endParaRPr lang="en-US"/>
-          </a:p>
-        </p:txBody>
-      </p:sp>
+        </p:nvPicPr>
+        <p:blipFill>
+          <a:blip r:embed="rId2">
+            <a:extLst>
+              <a:ext uri="{28A0092B-C50C-407E-A947-70E740481C1C}">
+                <a14:useLocalDpi xmlns:a14="http://schemas.microsoft.com/office/drawing/2010/main" val="0"/>
+              </a:ext>
+            </a:extLst>
+          </a:blip>
+          <a:stretch>
+            <a:fillRect/>
+          </a:stretch>
+        </p:blipFill>
+        <p:spPr>
+          <a:xfrm>
+            <a:off x="0" y="0"/>
+            <a:ext cx="12156666" cy="6851331"/>
+          </a:xfrm>
+        </p:spPr>
+      </p:pic>
     </p:spTree>
     <p:extLst>
       <p:ext uri="{BB962C8B-B14F-4D97-AF65-F5344CB8AC3E}">
@@ -6788,25 +6811,41 @@
           </a:p>
         </p:txBody>
       </p:sp>
-      <p:sp>
-        <p:nvSpPr>
-          <p:cNvPr id="3" name="Content Placeholder 2"/>
-          <p:cNvSpPr>
-            <a:spLocks noGrp="1"/>
-          </p:cNvSpPr>
+      <p:pic>
+        <p:nvPicPr>
+          <p:cNvPr id="5" name="Content Placeholder 4">
+            <a:extLst>
+              <a:ext uri="{FF2B5EF4-FFF2-40B4-BE49-F238E27FC236}">
+                <a16:creationId xmlns:a16="http://schemas.microsoft.com/office/drawing/2014/main" id="{A90E3EED-09AB-2980-9B1E-497AA97DB52A}"/>
+              </a:ext>
+            </a:extLst>
+          </p:cNvPr>
+          <p:cNvPicPr>
+            <a:picLocks noGrp="1" noChangeAspect="1"/>
+          </p:cNvPicPr>
           <p:nvPr>
             <p:ph idx="1"/>
           </p:nvPr>
-        </p:nvSpPr>
-        <p:spPr/>
-        <p:txBody>
-          <a:bodyPr/>
-          <a:lstStyle/>
-          <a:p>
-            <a:endParaRPr lang="vi-VN"/>
-          </a:p>
-        </p:txBody>
-      </p:sp>
+        </p:nvPicPr>
+        <p:blipFill>
+          <a:blip r:embed="rId2">
+            <a:extLst>
+              <a:ext uri="{28A0092B-C50C-407E-A947-70E740481C1C}">
+                <a14:useLocalDpi xmlns:a14="http://schemas.microsoft.com/office/drawing/2010/main" val="0"/>
+              </a:ext>
+            </a:extLst>
+          </a:blip>
+          <a:stretch>
+            <a:fillRect/>
+          </a:stretch>
+        </p:blipFill>
+        <p:spPr>
+          <a:xfrm>
+            <a:off x="0" y="1"/>
+            <a:ext cx="12184143" cy="6858000"/>
+          </a:xfrm>
+        </p:spPr>
+      </p:pic>
     </p:spTree>
     <p:extLst>
       <p:ext uri="{BB962C8B-B14F-4D97-AF65-F5344CB8AC3E}">
@@ -6894,10 +6933,10 @@
         <mc:Choice xmlns:am3d="http://schemas.microsoft.com/office/drawing/2017/model3d" Requires="am3d">
           <p:graphicFrame>
             <p:nvGraphicFramePr>
-              <p:cNvPr id="6" name="Content Placeholder 5">
+              <p:cNvPr id="10" name="Content Placeholder 9" descr="Male Spikey Hair Jeans">
                 <a:extLst>
                   <a:ext uri="{FF2B5EF4-FFF2-40B4-BE49-F238E27FC236}">
-                    <a16:creationId xmlns:a16="http://schemas.microsoft.com/office/drawing/2014/main" id="{2F1408E7-970D-0DE7-3625-58CE721B9B74}"/>
+                    <a16:creationId xmlns:a16="http://schemas.microsoft.com/office/drawing/2014/main" id="{CA733842-B6F5-4CCD-6E69-3357A78311B5}"/>
                   </a:ext>
                 </a:extLst>
               </p:cNvPr>
@@ -6908,14 +6947,14 @@
                 <p:ph sz="half" idx="2"/>
                 <p:extLst>
                   <p:ext uri="{D42A27DB-BD31-4B8C-83A1-F6EECF244321}">
-                    <p14:modId xmlns:p14="http://schemas.microsoft.com/office/powerpoint/2010/main" val="964262310"/>
+                    <p14:modId xmlns:p14="http://schemas.microsoft.com/office/powerpoint/2010/main" val="258007347"/>
                   </p:ext>
                 </p:extLst>
               </p:nvPr>
             </p:nvGraphicFramePr>
             <p:xfrm>
-              <a:off x="7781170" y="2161468"/>
-              <a:ext cx="1963659" cy="3679651"/>
+              <a:off x="7127864" y="2092751"/>
+              <a:ext cx="3298181" cy="3558053"/>
             </p:xfrm>
             <a:graphic>
               <a:graphicData uri="http://schemas.microsoft.com/office/drawing/2017/model3d">
@@ -6923,21 +6962,21 @@
                   <am3d:spPr>
                     <a:xfrm>
                       <a:off x="0" y="0"/>
-                      <a:ext cx="1963659" cy="3679651"/>
+                      <a:ext cx="3298181" cy="3558053"/>
                     </a:xfrm>
                     <a:prstGeom prst="rect">
                       <a:avLst/>
                     </a:prstGeom>
                   </am3d:spPr>
                   <am3d:camera>
-                    <am3d:pos x="0" y="0" z="54660196"/>
+                    <am3d:pos x="0" y="0" z="64780441"/>
                     <am3d:up dx="0" dy="36000000" dz="0"/>
                     <am3d:lookAt x="0" y="0" z="0"/>
                     <am3d:perspective fov="2700000"/>
                   </am3d:camera>
                   <am3d:trans>
-                    <am3d:meterPerModelUnit n="48214" d="1000000"/>
-                    <am3d:preTrans dx="0" dy="-17901760" dz="-55456"/>
+                    <am3d:meterPerModelUnit n="646200" d="1000000"/>
+                    <am3d:preTrans dx="0" dy="-18007853" dz="-89082"/>
                     <am3d:scale>
                       <am3d:sx n="1000000" d="1000000"/>
                       <am3d:sy n="1000000" d="1000000"/>
@@ -6949,7 +6988,7 @@
                   <am3d:raster rName="Office3DRenderer" rVer="16.0.8326">
                     <am3d:blip r:embed="rId8"/>
                   </am3d:raster>
-                  <am3d:objViewport viewportSz="4147631"/>
+                  <am3d:objViewport viewportSz="4966971"/>
                   <am3d:ambientLight>
                     <am3d:clr>
                       <a:scrgbClr r="50000" g="50000" b="50000"/>
@@ -6985,10 +7024,10 @@
         <mc:Fallback>
           <p:pic>
             <p:nvPicPr>
-              <p:cNvPr id="6" name="Content Placeholder 5">
+              <p:cNvPr id="10" name="Content Placeholder 9" descr="Male Spikey Hair Jeans">
                 <a:extLst>
                   <a:ext uri="{FF2B5EF4-FFF2-40B4-BE49-F238E27FC236}">
-                    <a16:creationId xmlns:a16="http://schemas.microsoft.com/office/drawing/2014/main" id="{2F1408E7-970D-0DE7-3625-58CE721B9B74}"/>
+                    <a16:creationId xmlns:a16="http://schemas.microsoft.com/office/drawing/2014/main" id="{CA733842-B6F5-4CCD-6E69-3357A78311B5}"/>
                   </a:ext>
                 </a:extLst>
               </p:cNvPr>
@@ -7005,8 +7044,8 @@
             </p:blipFill>
             <p:spPr>
               <a:xfrm>
-                <a:off x="7781170" y="2161468"/>
-                <a:ext cx="1963659" cy="3679651"/>
+                <a:off x="7127864" y="2092751"/>
+                <a:ext cx="3298181" cy="3558053"/>
               </a:xfrm>
               <a:prstGeom prst="rect">
                 <a:avLst/>
@@ -7455,25 +7494,41 @@
           </a:p>
         </p:txBody>
       </p:sp>
-      <p:sp>
-        <p:nvSpPr>
-          <p:cNvPr id="3" name="Content Placeholder 2"/>
-          <p:cNvSpPr>
-            <a:spLocks noGrp="1"/>
-          </p:cNvSpPr>
+      <p:pic>
+        <p:nvPicPr>
+          <p:cNvPr id="6" name="Content Placeholder 5">
+            <a:extLst>
+              <a:ext uri="{FF2B5EF4-FFF2-40B4-BE49-F238E27FC236}">
+                <a16:creationId xmlns:a16="http://schemas.microsoft.com/office/drawing/2014/main" id="{D95F94D5-BE55-CF2C-2F76-F741F93BD9FD}"/>
+              </a:ext>
+            </a:extLst>
+          </p:cNvPr>
+          <p:cNvPicPr>
+            <a:picLocks noGrp="1" noChangeAspect="1"/>
+          </p:cNvPicPr>
           <p:nvPr>
             <p:ph sz="half" idx="1"/>
           </p:nvPr>
-        </p:nvSpPr>
-        <p:spPr/>
-        <p:txBody>
-          <a:bodyPr/>
-          <a:lstStyle/>
-          <a:p>
-            <a:endParaRPr lang="vi-VN"/>
-          </a:p>
-        </p:txBody>
-      </p:sp>
+        </p:nvPicPr>
+        <p:blipFill>
+          <a:blip r:embed="rId2">
+            <a:extLst>
+              <a:ext uri="{28A0092B-C50C-407E-A947-70E740481C1C}">
+                <a14:useLocalDpi xmlns:a14="http://schemas.microsoft.com/office/drawing/2010/main" val="0"/>
+              </a:ext>
+            </a:extLst>
+          </a:blip>
+          <a:stretch>
+            <a:fillRect/>
+          </a:stretch>
+        </p:blipFill>
+        <p:spPr>
+          <a:xfrm>
+            <a:off x="0" y="0"/>
+            <a:ext cx="12203809" cy="6858000"/>
+          </a:xfrm>
+        </p:spPr>
+      </p:pic>
       <p:sp>
         <p:nvSpPr>
           <p:cNvPr id="4" name="Content Placeholder 3"/>

--- a/Data/PPT_Learn/PPT_File/13.pptx
+++ b/Data/PPT_Learn/PPT_File/13.pptx
@@ -3363,7 +3363,7 @@
           <a:p>
             <a:fld id="{51DA3061-A0A7-4F4A-8031-9CD73C4CB18A}" type="datetimeFigureOut">
               <a:rPr lang="en-US" smtClean="0"/>
-              <a:t>12/1/2025</a:t>
+              <a:t>12/9/2025</a:t>
             </a:fld>
             <a:endParaRPr lang="en-US"/>
           </a:p>
@@ -3561,7 +3561,7 @@
           <a:p>
             <a:fld id="{51DA3061-A0A7-4F4A-8031-9CD73C4CB18A}" type="datetimeFigureOut">
               <a:rPr lang="en-US" smtClean="0"/>
-              <a:t>12/1/2025</a:t>
+              <a:t>12/9/2025</a:t>
             </a:fld>
             <a:endParaRPr lang="en-US"/>
           </a:p>
@@ -3769,7 +3769,7 @@
           <a:p>
             <a:fld id="{51DA3061-A0A7-4F4A-8031-9CD73C4CB18A}" type="datetimeFigureOut">
               <a:rPr lang="en-US" smtClean="0"/>
-              <a:t>12/1/2025</a:t>
+              <a:t>12/9/2025</a:t>
             </a:fld>
             <a:endParaRPr lang="en-US"/>
           </a:p>
@@ -3967,7 +3967,7 @@
           <a:p>
             <a:fld id="{51DA3061-A0A7-4F4A-8031-9CD73C4CB18A}" type="datetimeFigureOut">
               <a:rPr lang="en-US" smtClean="0"/>
-              <a:t>12/1/2025</a:t>
+              <a:t>12/9/2025</a:t>
             </a:fld>
             <a:endParaRPr lang="en-US"/>
           </a:p>
@@ -4242,7 +4242,7 @@
           <a:p>
             <a:fld id="{51DA3061-A0A7-4F4A-8031-9CD73C4CB18A}" type="datetimeFigureOut">
               <a:rPr lang="en-US" smtClean="0"/>
-              <a:t>12/1/2025</a:t>
+              <a:t>12/9/2025</a:t>
             </a:fld>
             <a:endParaRPr lang="en-US"/>
           </a:p>
@@ -4507,7 +4507,7 @@
           <a:p>
             <a:fld id="{51DA3061-A0A7-4F4A-8031-9CD73C4CB18A}" type="datetimeFigureOut">
               <a:rPr lang="en-US" smtClean="0"/>
-              <a:t>12/1/2025</a:t>
+              <a:t>12/9/2025</a:t>
             </a:fld>
             <a:endParaRPr lang="en-US"/>
           </a:p>
@@ -4919,7 +4919,7 @@
           <a:p>
             <a:fld id="{51DA3061-A0A7-4F4A-8031-9CD73C4CB18A}" type="datetimeFigureOut">
               <a:rPr lang="en-US" smtClean="0"/>
-              <a:t>12/1/2025</a:t>
+              <a:t>12/9/2025</a:t>
             </a:fld>
             <a:endParaRPr lang="en-US"/>
           </a:p>
@@ -5060,7 +5060,7 @@
           <a:p>
             <a:fld id="{51DA3061-A0A7-4F4A-8031-9CD73C4CB18A}" type="datetimeFigureOut">
               <a:rPr lang="en-US" smtClean="0"/>
-              <a:t>12/1/2025</a:t>
+              <a:t>12/9/2025</a:t>
             </a:fld>
             <a:endParaRPr lang="en-US"/>
           </a:p>
@@ -5173,7 +5173,7 @@
           <a:p>
             <a:fld id="{51DA3061-A0A7-4F4A-8031-9CD73C4CB18A}" type="datetimeFigureOut">
               <a:rPr lang="en-US" smtClean="0"/>
-              <a:t>12/1/2025</a:t>
+              <a:t>12/9/2025</a:t>
             </a:fld>
             <a:endParaRPr lang="en-US"/>
           </a:p>
@@ -5484,7 +5484,7 @@
           <a:p>
             <a:fld id="{51DA3061-A0A7-4F4A-8031-9CD73C4CB18A}" type="datetimeFigureOut">
               <a:rPr lang="en-US" smtClean="0"/>
-              <a:t>12/1/2025</a:t>
+              <a:t>12/9/2025</a:t>
             </a:fld>
             <a:endParaRPr lang="en-US"/>
           </a:p>
@@ -5772,7 +5772,7 @@
           <a:p>
             <a:fld id="{51DA3061-A0A7-4F4A-8031-9CD73C4CB18A}" type="datetimeFigureOut">
               <a:rPr lang="en-US" smtClean="0"/>
-              <a:t>12/1/2025</a:t>
+              <a:t>12/9/2025</a:t>
             </a:fld>
             <a:endParaRPr lang="en-US"/>
           </a:p>
@@ -6016,7 +6016,7 @@
           <a:p>
             <a:fld id="{51DA3061-A0A7-4F4A-8031-9CD73C4CB18A}" type="datetimeFigureOut">
               <a:rPr lang="en-US" smtClean="0"/>
-              <a:t>12/1/2025</a:t>
+              <a:t>12/9/2025</a:t>
             </a:fld>
             <a:endParaRPr lang="en-US"/>
           </a:p>
@@ -7117,7 +7117,7 @@
             <p:ph sz="half" idx="1"/>
             <p:extLst>
               <p:ext uri="{D42A27DB-BD31-4B8C-83A1-F6EECF244321}">
-                <p14:modId xmlns:p14="http://schemas.microsoft.com/office/powerpoint/2010/main" val="902255830"/>
+                <p14:modId xmlns:p14="http://schemas.microsoft.com/office/powerpoint/2010/main" val="1870674825"/>
               </p:ext>
             </p:extLst>
           </p:nvPr>
@@ -7226,6 +7226,10 @@
                     <a:lstStyle/>
                     <a:p>
                       <a:pPr algn="ctr"/>
+                      <a:r>
+                        <a:rPr lang="en-US" b="1" dirty="0"/>
+                        <a:t>5</a:t>
+                      </a:r>
                       <a:endParaRPr lang="vi-VN" b="1" dirty="0"/>
                     </a:p>
                   </a:txBody>
@@ -7263,6 +7267,10 @@
                     <a:lstStyle/>
                     <a:p>
                       <a:pPr algn="ctr"/>
+                      <a:r>
+                        <a:rPr lang="en-US" b="1" dirty="0"/>
+                        <a:t>7</a:t>
+                      </a:r>
                       <a:endParaRPr lang="vi-VN" b="1" dirty="0"/>
                     </a:p>
                   </a:txBody>
@@ -7300,6 +7308,10 @@
                     <a:lstStyle/>
                     <a:p>
                       <a:pPr algn="ctr"/>
+                      <a:r>
+                        <a:rPr lang="en-US" b="1" dirty="0"/>
+                        <a:t>4</a:t>
+                      </a:r>
                       <a:endParaRPr lang="vi-VN" b="1" dirty="0"/>
                     </a:p>
                   </a:txBody>
@@ -7337,6 +7349,10 @@
                     <a:lstStyle/>
                     <a:p>
                       <a:pPr algn="ctr"/>
+                      <a:r>
+                        <a:rPr lang="en-US" b="1" dirty="0"/>
+                        <a:t>7</a:t>
+                      </a:r>
                       <a:endParaRPr lang="vi-VN" b="1" dirty="0"/>
                     </a:p>
                   </a:txBody>
@@ -7374,6 +7390,10 @@
                     <a:lstStyle/>
                     <a:p>
                       <a:pPr algn="ctr"/>
+                      <a:r>
+                        <a:rPr lang="en-US" b="1" dirty="0"/>
+                        <a:t>6</a:t>
+                      </a:r>
                       <a:endParaRPr lang="vi-VN" b="1" dirty="0"/>
                     </a:p>
                   </a:txBody>
@@ -7411,6 +7431,10 @@
                     <a:lstStyle/>
                     <a:p>
                       <a:pPr algn="ctr"/>
+                      <a:r>
+                        <a:rPr lang="en-US" b="1" dirty="0"/>
+                        <a:t>8</a:t>
+                      </a:r>
                       <a:endParaRPr lang="vi-VN" b="1" dirty="0"/>
                     </a:p>
                   </a:txBody>
